--- a/public/fun/pack/pptx/familypro/가족소개프리미엄_43_3대가족_크림슨골드.pptx
+++ b/public/fun/pack/pptx/familypro/가족소개프리미엄_43_3대가족_크림슨골드.pptx
@@ -113,12 +113,12 @@
   <p:extLst>
     <p:ext uri="{521415D9-36F7-43E2-AB2F-B90AF26B5E84}">
       <p14:sectionLst xmlns:p14="http://schemas.microsoft.com/office/powerpoint/2010/main">
-        <p14:section name="시작" id="{A494802C-FD34-4D67-8614-1DBEB4BBCFCA}">
+        <p14:section name="시작" id="{6B91A8C6-00C8-4F34-ADAF-CDD43A2FE49E}">
           <p14:sldIdLst>
             <p14:sldId id="256"/>
           </p14:sldIdLst>
         </p14:section>
-        <p14:section name="본문" id="{A117F85C-B374-4142-B14C-750554DCB85F}">
+        <p14:section name="본문" id="{435B838B-A0F5-4DC1-9826-2D69C498A355}">
           <p14:sldIdLst>
             <p14:sldId id="257"/>
             <p14:sldId id="258"/>
@@ -127,7 +127,7 @@
             <p14:sldId id="261"/>
           </p14:sldIdLst>
         </p14:section>
-        <p14:section name="마무리" id="{18967482-4892-4DF2-9FE2-88C451B9C49B}">
+        <p14:section name="마무리" id="{7D347B32-CF96-456C-9CA9-BF34574693F0}">
           <p14:sldIdLst>
             <p14:sldId id="262"/>
           </p14:sldIdLst>
@@ -1567,7 +1567,7 @@
             </a:lvl1pPr>
           </a:lstStyle>
           <a:p>
-            <a:fld id="{22DD0930-AD49-4A3E-96B7-8D3FCA01DA00}" type="slidenum">
+            <a:fld id="{CA0C9DD5-69A7-4677-B3F6-4F710D795B75}" type="slidenum">
               <a:rPr lang="en-US"/>
               <a:t>‹#›</a:t>
             </a:fld>
@@ -2223,7 +2223,7 @@
             </a:lvl1pPr>
           </a:lstStyle>
           <a:p>
-            <a:fld id="{C7AA0B61-83FB-45D5-BFEB-30E323AABC0E}" type="slidenum">
+            <a:fld id="{24AE7870-4B02-45E7-9DAA-6AF9FDB50336}" type="slidenum">
               <a:rPr lang="en-US"/>
               <a:t>‹#›</a:t>
             </a:fld>
@@ -2860,7 +2860,7 @@
             </a:lvl1pPr>
           </a:lstStyle>
           <a:p>
-            <a:fld id="{4E8C6879-F261-4733-A0B7-7CC3CC67EEA9}" type="slidenum">
+            <a:fld id="{45D4B652-6ACD-4362-87A5-600A78823A8F}" type="slidenum">
               <a:rPr lang="en-US"/>
               <a:t>‹#›</a:t>
             </a:fld>
@@ -3743,7 +3743,7 @@
           <a:p>
             <a:r>
               <a:rPr lang="ko-KR"/>
-              <a:t>3대 가족 · 0000. 00. 00</a:t>
+              <a:t>3대 가족 · 날짜 입력</a:t>
             </a:r>
           </a:p>
         </p:txBody>
@@ -4242,7 +4242,7 @@
           <a:bodyPr/>
           <a:lstStyle/>
           <a:p>
-            <a:fld id="{E4751A1D-1A40-4929-9BC6-16B36B3372FF}" type="slidenum">
+            <a:fld id="{1F4C9668-3CDF-4CDF-BAE7-C45B17A66F8F}" type="slidenum">
               <a:rPr lang="en-US"/>
               <a:t>‹#›</a:t>
             </a:fld>
@@ -5290,7 +5290,7 @@
           <a:bodyPr/>
           <a:lstStyle/>
           <a:p>
-            <a:fld id="{6CEE1725-B63E-440B-B7B5-3C0F1EB4D6FB}" type="slidenum">
+            <a:fld id="{38A6B300-6BC7-478B-8041-819865288F85}" type="slidenum">
               <a:rPr lang="en-US"/>
               <a:t>‹#›</a:t>
             </a:fld>
@@ -6132,7 +6132,7 @@
           <a:bodyPr/>
           <a:lstStyle/>
           <a:p>
-            <a:fld id="{90EA4F14-B09C-471E-8B2D-72E3B77D76A6}" type="slidenum">
+            <a:fld id="{E0817930-FEE6-4493-B236-F64496F3D1D6}" type="slidenum">
               <a:rPr lang="en-US"/>
               <a:t>‹#›</a:t>
             </a:fld>
@@ -7414,7 +7414,7 @@
           <a:bodyPr/>
           <a:lstStyle/>
           <a:p>
-            <a:fld id="{305781B2-A2E4-4DC2-A6D2-3587208C0A43}" type="slidenum">
+            <a:fld id="{18AA2070-5B6C-4CD4-9FFF-BAAE87AE4D9F}" type="slidenum">
               <a:rPr lang="en-US"/>
               <a:t>‹#›</a:t>
             </a:fld>
@@ -7502,7 +7502,7 @@
           <a:bodyPr/>
           <a:lstStyle/>
           <a:p>
-            <a:fld id="{B522F06E-5405-4CB5-A3E7-248C42DA357C}" type="slidenum">
+            <a:fld id="{9EA0199B-D853-4758-B131-39B30D9090A3}" type="slidenum">
               <a:rPr lang="en-US"/>
               <a:t>‹#›</a:t>
             </a:fld>
